--- a/sqlserver-sql/presentation/sqlserver-dql.pptx
+++ b/sqlserver-sql/presentation/sqlserver-dql.pptx
@@ -3848,7 +3848,7 @@
                 </a:solidFill>
                 <a:latin typeface="Courier"/>
               </a:rPr>
-              <a:t>-- Retrieve the first 5 employees</a:t>
+              <a:t>-- Retrieve the first 5 employees by employee number</a:t>
             </a:r>
             <a:br>
               <a:rPr sz="1400" dirty="0"/>
@@ -3916,11 +3916,12 @@
               </a:rPr>
               <a:t>employees.emp</a:t>
             </a:r>
+            <a:br/>
             <a:r>
               <a:rPr sz="1400" dirty="0">
                 <a:latin typeface="Courier"/>
               </a:rPr>
-              <a:t>;</a:t>
+              <a:t>ORDER BY empno;</a:t>
             </a:r>
             <a:br>
               <a:rPr sz="1400" dirty="0"/>
